--- a/Figures/PowerPointFigures/Skematic__degrees.pptx
+++ b/Figures/PowerPointFigures/Skematic__degrees.pptx
@@ -254,7 +254,7 @@
           <a:p>
             <a:fld id="{82297096-DC01-446A-8091-F0DF7F92F99F}" type="datetimeFigureOut">
               <a:rPr lang="en-CA" smtClean="0"/>
-              <a:t>2025-06-05</a:t>
+              <a:t>2026-02-23</a:t>
             </a:fld>
             <a:endParaRPr lang="en-CA"/>
           </a:p>
@@ -424,7 +424,7 @@
           <a:p>
             <a:fld id="{82297096-DC01-446A-8091-F0DF7F92F99F}" type="datetimeFigureOut">
               <a:rPr lang="en-CA" smtClean="0"/>
-              <a:t>2025-06-05</a:t>
+              <a:t>2026-02-23</a:t>
             </a:fld>
             <a:endParaRPr lang="en-CA"/>
           </a:p>
@@ -604,7 +604,7 @@
           <a:p>
             <a:fld id="{82297096-DC01-446A-8091-F0DF7F92F99F}" type="datetimeFigureOut">
               <a:rPr lang="en-CA" smtClean="0"/>
-              <a:t>2025-06-05</a:t>
+              <a:t>2026-02-23</a:t>
             </a:fld>
             <a:endParaRPr lang="en-CA"/>
           </a:p>
@@ -774,7 +774,7 @@
           <a:p>
             <a:fld id="{82297096-DC01-446A-8091-F0DF7F92F99F}" type="datetimeFigureOut">
               <a:rPr lang="en-CA" smtClean="0"/>
-              <a:t>2025-06-05</a:t>
+              <a:t>2026-02-23</a:t>
             </a:fld>
             <a:endParaRPr lang="en-CA"/>
           </a:p>
@@ -1020,7 +1020,7 @@
           <a:p>
             <a:fld id="{82297096-DC01-446A-8091-F0DF7F92F99F}" type="datetimeFigureOut">
               <a:rPr lang="en-CA" smtClean="0"/>
-              <a:t>2025-06-05</a:t>
+              <a:t>2026-02-23</a:t>
             </a:fld>
             <a:endParaRPr lang="en-CA"/>
           </a:p>
@@ -1252,7 +1252,7 @@
           <a:p>
             <a:fld id="{82297096-DC01-446A-8091-F0DF7F92F99F}" type="datetimeFigureOut">
               <a:rPr lang="en-CA" smtClean="0"/>
-              <a:t>2025-06-05</a:t>
+              <a:t>2026-02-23</a:t>
             </a:fld>
             <a:endParaRPr lang="en-CA"/>
           </a:p>
@@ -1619,7 +1619,7 @@
           <a:p>
             <a:fld id="{82297096-DC01-446A-8091-F0DF7F92F99F}" type="datetimeFigureOut">
               <a:rPr lang="en-CA" smtClean="0"/>
-              <a:t>2025-06-05</a:t>
+              <a:t>2026-02-23</a:t>
             </a:fld>
             <a:endParaRPr lang="en-CA"/>
           </a:p>
@@ -1737,7 +1737,7 @@
           <a:p>
             <a:fld id="{82297096-DC01-446A-8091-F0DF7F92F99F}" type="datetimeFigureOut">
               <a:rPr lang="en-CA" smtClean="0"/>
-              <a:t>2025-06-05</a:t>
+              <a:t>2026-02-23</a:t>
             </a:fld>
             <a:endParaRPr lang="en-CA"/>
           </a:p>
@@ -1832,7 +1832,7 @@
           <a:p>
             <a:fld id="{82297096-DC01-446A-8091-F0DF7F92F99F}" type="datetimeFigureOut">
               <a:rPr lang="en-CA" smtClean="0"/>
-              <a:t>2025-06-05</a:t>
+              <a:t>2026-02-23</a:t>
             </a:fld>
             <a:endParaRPr lang="en-CA"/>
           </a:p>
@@ -2109,7 +2109,7 @@
           <a:p>
             <a:fld id="{82297096-DC01-446A-8091-F0DF7F92F99F}" type="datetimeFigureOut">
               <a:rPr lang="en-CA" smtClean="0"/>
-              <a:t>2025-06-05</a:t>
+              <a:t>2026-02-23</a:t>
             </a:fld>
             <a:endParaRPr lang="en-CA"/>
           </a:p>
@@ -2366,7 +2366,7 @@
           <a:p>
             <a:fld id="{82297096-DC01-446A-8091-F0DF7F92F99F}" type="datetimeFigureOut">
               <a:rPr lang="en-CA" smtClean="0"/>
-              <a:t>2025-06-05</a:t>
+              <a:t>2026-02-23</a:t>
             </a:fld>
             <a:endParaRPr lang="en-CA"/>
           </a:p>
@@ -2579,7 +2579,7 @@
           <a:p>
             <a:fld id="{82297096-DC01-446A-8091-F0DF7F92F99F}" type="datetimeFigureOut">
               <a:rPr lang="en-CA" smtClean="0"/>
-              <a:t>2025-06-05</a:t>
+              <a:t>2026-02-23</a:t>
             </a:fld>
             <a:endParaRPr lang="en-CA"/>
           </a:p>
@@ -4061,13 +4061,7 @@
                         <a:rPr lang="en-US" i="1">
                           <a:latin typeface="Cambria Math" panose="02040503050406030204" pitchFamily="18" charset="0"/>
                         </a:rPr>
-                        <m:t>=</m:t>
-                      </m:r>
-                      <m:r>
-                        <a:rPr lang="en-US" i="1">
-                          <a:latin typeface="Cambria Math" panose="02040503050406030204" pitchFamily="18" charset="0"/>
-                        </a:rPr>
-                        <m:t>20</m:t>
+                        <m:t>=20</m:t>
                       </m:r>
                     </m:oMath>
                   </m:oMathPara>
@@ -4208,13 +4202,7 @@
                         <a:rPr lang="en-US" i="1">
                           <a:latin typeface="Cambria Math" panose="02040503050406030204" pitchFamily="18" charset="0"/>
                         </a:rPr>
-                        <m:t>=</m:t>
-                      </m:r>
-                      <m:r>
-                        <a:rPr lang="en-US" i="1">
-                          <a:latin typeface="Cambria Math" panose="02040503050406030204" pitchFamily="18" charset="0"/>
-                        </a:rPr>
-                        <m:t>5</m:t>
+                        <m:t>=5</m:t>
                       </m:r>
                     </m:oMath>
                   </m:oMathPara>
@@ -4269,8 +4257,8 @@
           </p:sp>
         </mc:Fallback>
       </mc:AlternateContent>
-      <mc:AlternateContent xmlns:mc="http://schemas.openxmlformats.org/markup-compatibility/2006" xmlns:a14="http://schemas.microsoft.com/office/drawing/2010/main">
-        <mc:Choice Requires="a14">
+      <mc:AlternateContent xmlns:mc="http://schemas.openxmlformats.org/markup-compatibility/2006">
+        <mc:Choice xmlns:a14="http://schemas.microsoft.com/office/drawing/2010/main" Requires="a14">
           <p:sp>
             <p:nvSpPr>
               <p:cNvPr id="101" name="TextBox 100">
@@ -4309,7 +4297,7 @@
                       <m:sSubSup>
                         <m:sSubSupPr>
                           <m:ctrlPr>
-                            <a:rPr lang="en-CA" i="1">
+                            <a:rPr lang="en-CA" i="1" smtClean="0">
                               <a:latin typeface="Cambria Math" panose="02040503050406030204" pitchFamily="18" charset="0"/>
                             </a:rPr>
                           </m:ctrlPr>
@@ -4324,10 +4312,10 @@
                         </m:e>
                         <m:sub>
                           <m:r>
-                            <a:rPr lang="en-US" i="1">
+                            <a:rPr lang="en-US" b="0" i="1" smtClean="0">
                               <a:latin typeface="Cambria Math" panose="02040503050406030204" pitchFamily="18" charset="0"/>
                             </a:rPr>
-                            <m:t>𝑖</m:t>
+                            <m:t>𝑒</m:t>
                           </m:r>
                           <m:r>
                             <a:rPr lang="en-US" i="1">
@@ -4336,10 +4324,10 @@
                             <m:t>→</m:t>
                           </m:r>
                           <m:r>
-                            <a:rPr lang="en-US" i="1">
+                            <a:rPr lang="en-US" b="0" i="1" smtClean="0">
                               <a:latin typeface="Cambria Math" panose="02040503050406030204" pitchFamily="18" charset="0"/>
                             </a:rPr>
-                            <m:t>𝑒</m:t>
+                            <m:t>𝑖</m:t>
                           </m:r>
                         </m:sub>
                         <m:sup>
@@ -4355,13 +4343,7 @@
                         <a:rPr lang="en-US" i="1">
                           <a:latin typeface="Cambria Math" panose="02040503050406030204" pitchFamily="18" charset="0"/>
                         </a:rPr>
-                        <m:t>=</m:t>
-                      </m:r>
-                      <m:r>
-                        <a:rPr lang="en-US" i="1">
-                          <a:latin typeface="Cambria Math" panose="02040503050406030204" pitchFamily="18" charset="0"/>
-                        </a:rPr>
-                        <m:t>5</m:t>
+                        <m:t>=5</m:t>
                       </m:r>
                     </m:oMath>
                   </m:oMathPara>
@@ -4371,7 +4353,7 @@
             </p:txBody>
           </p:sp>
         </mc:Choice>
-        <mc:Fallback xmlns="">
+        <mc:Fallback>
           <p:sp>
             <p:nvSpPr>
               <p:cNvPr id="101" name="TextBox 100">
